--- a/exports/pptx/lessons/middle-module-11-multiplication-near-base/day-03-both-below-100.pptx
+++ b/exports/pptx/lessons/middle-module-11-multiplication-near-base/day-03-both-below-100.pptx
@@ -6361,7 +6361,30 @@
                 <a:ea typeface="Arial" pitchFamily="34" charset="-122"/>
                 <a:cs typeface="Arial" pitchFamily="34" charset="-120"/>
               </a:rPr>
-              <a:t>Answer key (teacher):</a:t>
+              <a:t>Answer key (teacher): </a:t>
+            </a:r>
+            <a:pPr algn="l" indent="0" marL="0">
+              <a:lnSpc>
+                <a:spcPts val="1680"/>
+              </a:lnSpc>
+              <a:spcBef>
+                <a:spcPts val="300"/>
+              </a:spcBef>
+              <a:spcAft>
+                <a:spcPts val="300"/>
+              </a:spcAft>
+              <a:buNone/>
+            </a:pPr>
+            <a:r>
+              <a:rPr lang="en-US" sz="1200" i="1" dirty="0">
+                <a:solidFill>
+                  <a:srgbClr val="1C2833"/>
+                </a:solidFill>
+                <a:latin typeface="Arial" pitchFamily="34" charset="0"/>
+                <a:ea typeface="Arial" pitchFamily="34" charset="-122"/>
+                <a:cs typeface="Arial" pitchFamily="34" charset="-120"/>
+              </a:rPr>
+              <a:t>Each row: Q · Deficits · Left · Right · Answer.</a:t>
             </a:r>
             <a:endParaRPr lang="en-US" sz="1200" dirty="0"/>
           </a:p>
@@ -6375,8 +6398,8 @@
         </p:nvSpPr>
         <p:spPr>
           <a:xfrm>
-            <a:off x="406301" y="6498134"/>
-            <a:ext cx="8498026" cy="213271"/>
+            <a:off x="634901" y="3502075"/>
+            <a:ext cx="8102798" cy="2475905"/>
           </a:xfrm>
           <a:prstGeom prst="rect">
             <a:avLst/>
@@ -6388,28 +6411,442 @@
           <a:bodyPr wrap="square" lIns="0" tIns="0" rIns="0" bIns="0" rtlCol="0" anchor="t"/>
           <a:lstStyle/>
           <a:p>
-            <a:pPr algn="l" indent="0" marL="0">
-              <a:lnSpc>
-                <a:spcPts val="1680"/>
-              </a:lnSpc>
-              <a:spcBef>
-                <a:spcPts val="300"/>
-              </a:spcBef>
-              <a:spcAft>
-                <a:spcPts val="300"/>
-              </a:spcAft>
-              <a:buNone/>
-            </a:pPr>
-            <a:r>
-              <a:rPr lang="en-US" sz="1200" i="1" dirty="0">
-                <a:solidFill>
-                  <a:srgbClr val="1C2833"/>
-                </a:solidFill>
-                <a:latin typeface="Arial" pitchFamily="34" charset="0"/>
-                <a:ea typeface="Arial" pitchFamily="34" charset="-122"/>
-                <a:cs typeface="Arial" pitchFamily="34" charset="-120"/>
-              </a:rPr>
-              <a:t>(Note Q8: 87 − 8 = 79, OR 92 − 13 = 79. Right = 13 × 8 = 104. Carry 1 → 80; right = 04. Answer: 8004.)</a:t>
+            <a:pPr algn="l" marL="342900" indent="-342900">
+              <a:lnSpc>
+                <a:spcPts val="1620"/>
+              </a:lnSpc>
+              <a:spcAft>
+                <a:spcPts val="300"/>
+              </a:spcAft>
+              <a:buSzPct val="100000"/>
+              <a:buChar char="•"/>
+            </a:pPr>
+            <a:r>
+              <a:rPr lang="en-US" sz="1200" b="1" dirty="0">
+                <a:solidFill>
+                  <a:srgbClr val="1C2833"/>
+                </a:solidFill>
+                <a:latin typeface="Arial" pitchFamily="34" charset="0"/>
+                <a:ea typeface="Arial" pitchFamily="34" charset="-122"/>
+                <a:cs typeface="Arial" pitchFamily="34" charset="-120"/>
+              </a:rPr>
+              <a:t>1</a:t>
+            </a:r>
+            <a:pPr algn="l" indent="0" marL="0">
+              <a:lnSpc>
+                <a:spcPts val="1620"/>
+              </a:lnSpc>
+              <a:spcAft>
+                <a:spcPts val="300"/>
+              </a:spcAft>
+              <a:buNone/>
+            </a:pPr>
+            <a:r>
+              <a:rPr lang="en-US" sz="1200" dirty="0">
+                <a:solidFill>
+                  <a:srgbClr val="1C2833"/>
+                </a:solidFill>
+                <a:latin typeface="Arial" pitchFamily="34" charset="0"/>
+                <a:ea typeface="Arial" pitchFamily="34" charset="-122"/>
+                <a:cs typeface="Arial" pitchFamily="34" charset="-120"/>
+              </a:rPr>
+              <a:t> — 3, 4 · 93 · 12 · 9312</a:t>
+            </a:r>
+            <a:endParaRPr lang="en-US" sz="1200" dirty="0"/>
+          </a:p>
+          <a:p>
+            <a:pPr algn="l" marL="342900" indent="-342900">
+              <a:lnSpc>
+                <a:spcPts val="1620"/>
+              </a:lnSpc>
+              <a:spcAft>
+                <a:spcPts val="300"/>
+              </a:spcAft>
+              <a:buSzPct val="100000"/>
+              <a:buChar char="•"/>
+            </a:pPr>
+            <a:r>
+              <a:rPr lang="en-US" sz="1200" b="1" dirty="0">
+                <a:solidFill>
+                  <a:srgbClr val="1C2833"/>
+                </a:solidFill>
+                <a:latin typeface="Arial" pitchFamily="34" charset="0"/>
+                <a:ea typeface="Arial" pitchFamily="34" charset="-122"/>
+                <a:cs typeface="Arial" pitchFamily="34" charset="-120"/>
+              </a:rPr>
+              <a:t>2</a:t>
+            </a:r>
+            <a:pPr algn="l" indent="0" marL="0">
+              <a:lnSpc>
+                <a:spcPts val="1620"/>
+              </a:lnSpc>
+              <a:spcAft>
+                <a:spcPts val="300"/>
+              </a:spcAft>
+              <a:buNone/>
+            </a:pPr>
+            <a:r>
+              <a:rPr lang="en-US" sz="1200" dirty="0">
+                <a:solidFill>
+                  <a:srgbClr val="1C2833"/>
+                </a:solidFill>
+                <a:latin typeface="Arial" pitchFamily="34" charset="0"/>
+                <a:ea typeface="Arial" pitchFamily="34" charset="-122"/>
+                <a:cs typeface="Arial" pitchFamily="34" charset="-120"/>
+              </a:rPr>
+              <a:t> — 2, 1 · 97 · 02 · 9702</a:t>
+            </a:r>
+            <a:endParaRPr lang="en-US" sz="1200" dirty="0"/>
+          </a:p>
+          <a:p>
+            <a:pPr algn="l" marL="342900" indent="-342900">
+              <a:lnSpc>
+                <a:spcPts val="1620"/>
+              </a:lnSpc>
+              <a:spcAft>
+                <a:spcPts val="300"/>
+              </a:spcAft>
+              <a:buSzPct val="100000"/>
+              <a:buChar char="•"/>
+            </a:pPr>
+            <a:r>
+              <a:rPr lang="en-US" sz="1200" b="1" dirty="0">
+                <a:solidFill>
+                  <a:srgbClr val="1C2833"/>
+                </a:solidFill>
+                <a:latin typeface="Arial" pitchFamily="34" charset="0"/>
+                <a:ea typeface="Arial" pitchFamily="34" charset="-122"/>
+                <a:cs typeface="Arial" pitchFamily="34" charset="-120"/>
+              </a:rPr>
+              <a:t>3</a:t>
+            </a:r>
+            <a:pPr algn="l" indent="0" marL="0">
+              <a:lnSpc>
+                <a:spcPts val="1620"/>
+              </a:lnSpc>
+              <a:spcAft>
+                <a:spcPts val="300"/>
+              </a:spcAft>
+              <a:buNone/>
+            </a:pPr>
+            <a:r>
+              <a:rPr lang="en-US" sz="1200" dirty="0">
+                <a:solidFill>
+                  <a:srgbClr val="1C2833"/>
+                </a:solidFill>
+                <a:latin typeface="Arial" pitchFamily="34" charset="0"/>
+                <a:ea typeface="Arial" pitchFamily="34" charset="-122"/>
+                <a:cs typeface="Arial" pitchFamily="34" charset="-120"/>
+              </a:rPr>
+              <a:t> — 5, 6 · 89 · 30 · 8930</a:t>
+            </a:r>
+            <a:endParaRPr lang="en-US" sz="1200" dirty="0"/>
+          </a:p>
+          <a:p>
+            <a:pPr algn="l" marL="342900" indent="-342900">
+              <a:lnSpc>
+                <a:spcPts val="1620"/>
+              </a:lnSpc>
+              <a:spcAft>
+                <a:spcPts val="300"/>
+              </a:spcAft>
+              <a:buSzPct val="100000"/>
+              <a:buChar char="•"/>
+            </a:pPr>
+            <a:r>
+              <a:rPr lang="en-US" sz="1200" b="1" dirty="0">
+                <a:solidFill>
+                  <a:srgbClr val="1C2833"/>
+                </a:solidFill>
+                <a:latin typeface="Arial" pitchFamily="34" charset="0"/>
+                <a:ea typeface="Arial" pitchFamily="34" charset="-122"/>
+                <a:cs typeface="Arial" pitchFamily="34" charset="-120"/>
+              </a:rPr>
+              <a:t>4</a:t>
+            </a:r>
+            <a:pPr algn="l" indent="0" marL="0">
+              <a:lnSpc>
+                <a:spcPts val="1620"/>
+              </a:lnSpc>
+              <a:spcAft>
+                <a:spcPts val="300"/>
+              </a:spcAft>
+              <a:buNone/>
+            </a:pPr>
+            <a:r>
+              <a:rPr lang="en-US" sz="1200" dirty="0">
+                <a:solidFill>
+                  <a:srgbClr val="1C2833"/>
+                </a:solidFill>
+                <a:latin typeface="Arial" pitchFamily="34" charset="0"/>
+                <a:ea typeface="Arial" pitchFamily="34" charset="-122"/>
+                <a:cs typeface="Arial" pitchFamily="34" charset="-120"/>
+              </a:rPr>
+              <a:t> — 7, 9 · 84 · 63 · 8463</a:t>
+            </a:r>
+            <a:endParaRPr lang="en-US" sz="1200" dirty="0"/>
+          </a:p>
+          <a:p>
+            <a:pPr algn="l" marL="342900" indent="-342900">
+              <a:lnSpc>
+                <a:spcPts val="1620"/>
+              </a:lnSpc>
+              <a:spcAft>
+                <a:spcPts val="300"/>
+              </a:spcAft>
+              <a:buSzPct val="100000"/>
+              <a:buChar char="•"/>
+            </a:pPr>
+            <a:r>
+              <a:rPr lang="en-US" sz="1200" b="1" dirty="0">
+                <a:solidFill>
+                  <a:srgbClr val="1C2833"/>
+                </a:solidFill>
+                <a:latin typeface="Arial" pitchFamily="34" charset="0"/>
+                <a:ea typeface="Arial" pitchFamily="34" charset="-122"/>
+                <a:cs typeface="Arial" pitchFamily="34" charset="-120"/>
+              </a:rPr>
+              <a:t>5</a:t>
+            </a:r>
+            <a:pPr algn="l" indent="0" marL="0">
+              <a:lnSpc>
+                <a:spcPts val="1620"/>
+              </a:lnSpc>
+              <a:spcAft>
+                <a:spcPts val="300"/>
+              </a:spcAft>
+              <a:buNone/>
+            </a:pPr>
+            <a:r>
+              <a:rPr lang="en-US" sz="1200" dirty="0">
+                <a:solidFill>
+                  <a:srgbClr val="1C2833"/>
+                </a:solidFill>
+                <a:latin typeface="Arial" pitchFamily="34" charset="0"/>
+                <a:ea typeface="Arial" pitchFamily="34" charset="-122"/>
+                <a:cs typeface="Arial" pitchFamily="34" charset="-120"/>
+              </a:rPr>
+              <a:t> — 1, 2 · 97 · 02 · 9702</a:t>
+            </a:r>
+            <a:endParaRPr lang="en-US" sz="1200" dirty="0"/>
+          </a:p>
+          <a:p>
+            <a:pPr algn="l" marL="342900" indent="-342900">
+              <a:lnSpc>
+                <a:spcPts val="1620"/>
+              </a:lnSpc>
+              <a:spcAft>
+                <a:spcPts val="300"/>
+              </a:spcAft>
+              <a:buSzPct val="100000"/>
+              <a:buChar char="•"/>
+            </a:pPr>
+            <a:r>
+              <a:rPr lang="en-US" sz="1200" b="1" dirty="0">
+                <a:solidFill>
+                  <a:srgbClr val="1C2833"/>
+                </a:solidFill>
+                <a:latin typeface="Arial" pitchFamily="34" charset="0"/>
+                <a:ea typeface="Arial" pitchFamily="34" charset="-122"/>
+                <a:cs typeface="Arial" pitchFamily="34" charset="-120"/>
+              </a:rPr>
+              <a:t>6</a:t>
+            </a:r>
+            <a:pPr algn="l" indent="0" marL="0">
+              <a:lnSpc>
+                <a:spcPts val="1620"/>
+              </a:lnSpc>
+              <a:spcAft>
+                <a:spcPts val="300"/>
+              </a:spcAft>
+              <a:buNone/>
+            </a:pPr>
+            <a:r>
+              <a:rPr lang="en-US" sz="1200" dirty="0">
+                <a:solidFill>
+                  <a:srgbClr val="1C2833"/>
+                </a:solidFill>
+                <a:latin typeface="Arial" pitchFamily="34" charset="0"/>
+                <a:ea typeface="Arial" pitchFamily="34" charset="-122"/>
+                <a:cs typeface="Arial" pitchFamily="34" charset="-120"/>
+              </a:rPr>
+              <a:t> — 8, 5 · 87 · 40 · 8740</a:t>
+            </a:r>
+            <a:endParaRPr lang="en-US" sz="1200" dirty="0"/>
+          </a:p>
+          <a:p>
+            <a:pPr algn="l" marL="342900" indent="-342900">
+              <a:lnSpc>
+                <a:spcPts val="1620"/>
+              </a:lnSpc>
+              <a:spcAft>
+                <a:spcPts val="300"/>
+              </a:spcAft>
+              <a:buSzPct val="100000"/>
+              <a:buChar char="•"/>
+            </a:pPr>
+            <a:r>
+              <a:rPr lang="en-US" sz="1200" b="1" dirty="0">
+                <a:solidFill>
+                  <a:srgbClr val="1C2833"/>
+                </a:solidFill>
+                <a:latin typeface="Arial" pitchFamily="34" charset="0"/>
+                <a:ea typeface="Arial" pitchFamily="34" charset="-122"/>
+                <a:cs typeface="Arial" pitchFamily="34" charset="-120"/>
+              </a:rPr>
+              <a:t>7</a:t>
+            </a:r>
+            <a:pPr algn="l" indent="0" marL="0">
+              <a:lnSpc>
+                <a:spcPts val="1620"/>
+              </a:lnSpc>
+              <a:spcAft>
+                <a:spcPts val="300"/>
+              </a:spcAft>
+              <a:buNone/>
+            </a:pPr>
+            <a:r>
+              <a:rPr lang="en-US" sz="1200" dirty="0">
+                <a:solidFill>
+                  <a:srgbClr val="1C2833"/>
+                </a:solidFill>
+                <a:latin typeface="Arial" pitchFamily="34" charset="0"/>
+                <a:ea typeface="Arial" pitchFamily="34" charset="-122"/>
+                <a:cs typeface="Arial" pitchFamily="34" charset="-120"/>
+              </a:rPr>
+              <a:t> — 12, 11 · 77+1=78 · 32 · 7832</a:t>
+            </a:r>
+            <a:endParaRPr lang="en-US" sz="1200" dirty="0"/>
+          </a:p>
+          <a:p>
+            <a:pPr algn="l" marL="342900" indent="-342900">
+              <a:lnSpc>
+                <a:spcPts val="1620"/>
+              </a:lnSpc>
+              <a:spcAft>
+                <a:spcPts val="300"/>
+              </a:spcAft>
+              <a:buSzPct val="100000"/>
+              <a:buChar char="•"/>
+            </a:pPr>
+            <a:r>
+              <a:rPr lang="en-US" sz="1200" b="1" dirty="0">
+                <a:solidFill>
+                  <a:srgbClr val="1C2833"/>
+                </a:solidFill>
+                <a:latin typeface="Arial" pitchFamily="34" charset="0"/>
+                <a:ea typeface="Arial" pitchFamily="34" charset="-122"/>
+                <a:cs typeface="Arial" pitchFamily="34" charset="-120"/>
+              </a:rPr>
+              <a:t>8</a:t>
+            </a:r>
+            <a:pPr algn="l" indent="0" marL="0">
+              <a:lnSpc>
+                <a:spcPts val="1620"/>
+              </a:lnSpc>
+              <a:spcAft>
+                <a:spcPts val="300"/>
+              </a:spcAft>
+              <a:buNone/>
+            </a:pPr>
+            <a:r>
+              <a:rPr lang="en-US" sz="1200" dirty="0">
+                <a:solidFill>
+                  <a:srgbClr val="1C2833"/>
+                </a:solidFill>
+                <a:latin typeface="Arial" pitchFamily="34" charset="0"/>
+                <a:ea typeface="Arial" pitchFamily="34" charset="-122"/>
+                <a:cs typeface="Arial" pitchFamily="34" charset="-120"/>
+              </a:rPr>
+              <a:t> — 13, 8 · 87−13=79 or 92−8=84... · (see note) · 8004</a:t>
+            </a:r>
+            <a:endParaRPr lang="en-US" sz="1200" dirty="0"/>
+          </a:p>
+          <a:p>
+            <a:pPr algn="l" marL="342900" indent="-342900">
+              <a:lnSpc>
+                <a:spcPts val="1620"/>
+              </a:lnSpc>
+              <a:spcAft>
+                <a:spcPts val="300"/>
+              </a:spcAft>
+              <a:buSzPct val="100000"/>
+              <a:buChar char="•"/>
+            </a:pPr>
+            <a:r>
+              <a:rPr lang="en-US" sz="1200" b="1" dirty="0">
+                <a:solidFill>
+                  <a:srgbClr val="1C2833"/>
+                </a:solidFill>
+                <a:latin typeface="Arial" pitchFamily="34" charset="0"/>
+                <a:ea typeface="Arial" pitchFamily="34" charset="-122"/>
+                <a:cs typeface="Arial" pitchFamily="34" charset="-120"/>
+              </a:rPr>
+              <a:t>9</a:t>
+            </a:r>
+            <a:pPr algn="l" indent="0" marL="0">
+              <a:lnSpc>
+                <a:spcPts val="1620"/>
+              </a:lnSpc>
+              <a:spcAft>
+                <a:spcPts val="300"/>
+              </a:spcAft>
+              <a:buNone/>
+            </a:pPr>
+            <a:r>
+              <a:rPr lang="en-US" sz="1200" dirty="0">
+                <a:solidFill>
+                  <a:srgbClr val="1C2833"/>
+                </a:solidFill>
+                <a:latin typeface="Arial" pitchFamily="34" charset="0"/>
+                <a:ea typeface="Arial" pitchFamily="34" charset="-122"/>
+                <a:cs typeface="Arial" pitchFamily="34" charset="-120"/>
+              </a:rPr>
+              <a:t> — 4, 4 · 92 · 16 · 9216</a:t>
+            </a:r>
+            <a:endParaRPr lang="en-US" sz="1200" dirty="0"/>
+          </a:p>
+          <a:p>
+            <a:pPr algn="l" marL="342900" indent="-342900">
+              <a:lnSpc>
+                <a:spcPts val="1620"/>
+              </a:lnSpc>
+              <a:spcAft>
+                <a:spcPts val="300"/>
+              </a:spcAft>
+              <a:buSzPct val="100000"/>
+              <a:buChar char="•"/>
+            </a:pPr>
+            <a:r>
+              <a:rPr lang="en-US" sz="1200" b="1" dirty="0">
+                <a:solidFill>
+                  <a:srgbClr val="1C2833"/>
+                </a:solidFill>
+                <a:latin typeface="Arial" pitchFamily="34" charset="0"/>
+                <a:ea typeface="Arial" pitchFamily="34" charset="-122"/>
+                <a:cs typeface="Arial" pitchFamily="34" charset="-120"/>
+              </a:rPr>
+              <a:t>10</a:t>
+            </a:r>
+            <a:pPr algn="l" indent="0" marL="0">
+              <a:lnSpc>
+                <a:spcPts val="1620"/>
+              </a:lnSpc>
+              <a:spcAft>
+                <a:spcPts val="300"/>
+              </a:spcAft>
+              <a:buNone/>
+            </a:pPr>
+            <a:r>
+              <a:rPr lang="en-US" sz="1200" dirty="0">
+                <a:solidFill>
+                  <a:srgbClr val="1C2833"/>
+                </a:solidFill>
+                <a:latin typeface="Arial" pitchFamily="34" charset="0"/>
+                <a:ea typeface="Arial" pitchFamily="34" charset="-122"/>
+                <a:cs typeface="Arial" pitchFamily="34" charset="-120"/>
+              </a:rPr>
+              <a:t> — 9, 13 · 91−13=78 or 87−9=78 · 117 → carry 1 → 79, right 17 · 7917</a:t>
             </a:r>
             <a:endParaRPr lang="en-US" sz="1200" dirty="0"/>
           </a:p>
@@ -6423,7 +6860,55 @@
         </p:nvSpPr>
         <p:spPr>
           <a:xfrm>
-            <a:off x="406301" y="6863804"/>
+            <a:off x="406301" y="6066830"/>
+            <a:ext cx="8498026" cy="213271"/>
+          </a:xfrm>
+          <a:prstGeom prst="rect">
+            <a:avLst/>
+          </a:prstGeom>
+          <a:noFill/>
+          <a:ln/>
+        </p:spPr>
+        <p:txBody>
+          <a:bodyPr wrap="square" lIns="0" tIns="0" rIns="0" bIns="0" rtlCol="0" anchor="t"/>
+          <a:lstStyle/>
+          <a:p>
+            <a:pPr algn="l" indent="0" marL="0">
+              <a:lnSpc>
+                <a:spcPts val="1680"/>
+              </a:lnSpc>
+              <a:spcBef>
+                <a:spcPts val="300"/>
+              </a:spcBef>
+              <a:spcAft>
+                <a:spcPts val="300"/>
+              </a:spcAft>
+              <a:buNone/>
+            </a:pPr>
+            <a:r>
+              <a:rPr lang="en-US" sz="1200" i="1" dirty="0">
+                <a:solidFill>
+                  <a:srgbClr val="1C2833"/>
+                </a:solidFill>
+                <a:latin typeface="Arial" pitchFamily="34" charset="0"/>
+                <a:ea typeface="Arial" pitchFamily="34" charset="-122"/>
+                <a:cs typeface="Arial" pitchFamily="34" charset="-120"/>
+              </a:rPr>
+              <a:t>(Note Q8: 87 − 8 = 79, OR 92 − 13 = 79. Right = 13 × 8 = 104. Carry 1 → 80; right = 04. Answer: 8004.)</a:t>
+            </a:r>
+            <a:endParaRPr lang="en-US" sz="1200" dirty="0"/>
+          </a:p>
+        </p:txBody>
+      </p:sp>
+      <p:sp>
+        <p:nvSpPr>
+          <p:cNvPr id="15" name="Text 13"/>
+          <p:cNvSpPr/>
+          <p:nvPr/>
+        </p:nvSpPr>
+        <p:spPr>
+          <a:xfrm>
+            <a:off x="406301" y="6432500"/>
             <a:ext cx="8498026" cy="213271"/>
           </a:xfrm>
           <a:prstGeom prst="rect">
